--- a/jumpstart-kits/js1-stackup-components/part1-stackup/JS1_Part1_Stackup_Presentation.pptx
+++ b/jumpstart-kits/js1-stackup-components/part1-stackup/JS1_Part1_Stackup_Presentation.pptx
@@ -1322,7 +1322,7 @@
       </p:grpSpPr>
       <p:pic>
         <p:nvPicPr>
-          <p:cNvPr id="2" name="Image 0" descr="/Users/bgupta/conductor/workspaces/py-components/nagoya/internal/deck-tooling/assets/jitx_logo.png">    </p:cNvPr>
+          <p:cNvPr id="2" name="Image 0" descr="/Users/bgupta/conductor/workspaces/py-components/warsaw/internal/deck-tooling/assets/jitx_logo.png">    </p:cNvPr>
           <p:cNvPicPr>
             <a:picLocks noChangeAspect="1"/>
           </p:cNvPicPr>
@@ -1776,7 +1776,7 @@
       </p:grpSpPr>
       <p:pic>
         <p:nvPicPr>
-          <p:cNvPr id="2" name="Image 0" descr="/Users/bgupta/conductor/workspaces/py-components/nagoya/internal/deck-tooling/assets/jitx_logo.png">    </p:cNvPr>
+          <p:cNvPr id="2" name="Image 0" descr="/Users/bgupta/conductor/workspaces/py-components/warsaw/internal/deck-tooling/assets/jitx_logo.png">    </p:cNvPr>
           <p:cNvPicPr>
             <a:picLocks noChangeAspect="1"/>
           </p:cNvPicPr>
@@ -2185,7 +2185,7 @@
       </p:grpSpPr>
       <p:pic>
         <p:nvPicPr>
-          <p:cNvPr id="2" name="Image 0" descr="/Users/bgupta/conductor/workspaces/py-components/nagoya/internal/deck-tooling/assets/jitx_logo.png">    </p:cNvPr>
+          <p:cNvPr id="2" name="Image 0" descr="/Users/bgupta/conductor/workspaces/py-components/warsaw/internal/deck-tooling/assets/jitx_logo.png">    </p:cNvPr>
           <p:cNvPicPr>
             <a:picLocks noChangeAspect="1"/>
           </p:cNvPicPr>
@@ -2287,7 +2287,7 @@
       </p:sp>
       <p:pic>
         <p:nvPicPr>
-          <p:cNvPr id="5" name="Image 1" descr="/Users/bgupta/conductor/workspaces/py-components/nagoya/internal/deck-tooling/assets/js1_part1_stackup.png">    </p:cNvPr>
+          <p:cNvPr id="5" name="Image 1" descr="/Users/bgupta/conductor/workspaces/py-components/warsaw/internal/deck-tooling/assets/js1_part1_stackup.png">    </p:cNvPr>
           <p:cNvPicPr>
             <a:picLocks noChangeAspect="1"/>
           </p:cNvPicPr>
@@ -2421,7 +2421,7 @@
       </p:grpSpPr>
       <p:pic>
         <p:nvPicPr>
-          <p:cNvPr id="2" name="Image 0" descr="/Users/bgupta/conductor/workspaces/py-components/nagoya/internal/deck-tooling/assets/jitx_logo.png">    </p:cNvPr>
+          <p:cNvPr id="2" name="Image 0" descr="/Users/bgupta/conductor/workspaces/py-components/warsaw/internal/deck-tooling/assets/jitx_logo.png">    </p:cNvPr>
           <p:cNvPicPr>
             <a:picLocks noChangeAspect="1"/>
           </p:cNvPicPr>
@@ -2889,7 +2889,7 @@
       </p:grpSpPr>
       <p:pic>
         <p:nvPicPr>
-          <p:cNvPr id="2" name="Image 0" descr="/Users/bgupta/conductor/workspaces/py-components/nagoya/internal/deck-tooling/assets/jitx_logo.png">    </p:cNvPr>
+          <p:cNvPr id="2" name="Image 0" descr="/Users/bgupta/conductor/workspaces/py-components/warsaw/internal/deck-tooling/assets/jitx_logo.png">    </p:cNvPr>
           <p:cNvPicPr>
             <a:picLocks noChangeAspect="1"/>
           </p:cNvPicPr>
@@ -3357,7 +3357,7 @@
       </p:grpSpPr>
       <p:pic>
         <p:nvPicPr>
-          <p:cNvPr id="2" name="Image 0" descr="/Users/bgupta/conductor/workspaces/py-components/nagoya/internal/deck-tooling/assets/jitx_logo.png">    </p:cNvPr>
+          <p:cNvPr id="2" name="Image 0" descr="/Users/bgupta/conductor/workspaces/py-components/warsaw/internal/deck-tooling/assets/jitx_logo.png">    </p:cNvPr>
           <p:cNvPicPr>
             <a:picLocks noChangeAspect="1"/>
           </p:cNvPicPr>
@@ -3569,7 +3569,7 @@
                 <a:ea typeface="Arial" pitchFamily="34" charset="-122"/>
                 <a:cs typeface="Arial" pitchFamily="34" charset="-120"/>
               </a:rPr>
-              <a:t>part1-stackup/JS1_Part1_Fab-Stackup_RevB.csv — a synthetic fab quote that parses with Python's csv module. Substitute your own fab's export.</a:t>
+              <a:t>part1-stackup/JS1_Part1_Fab-Stackup.csv — a synthetic fab quote that parses with Python's csv module. Substitute your own fab's export.</a:t>
             </a:r>
             <a:endParaRPr lang="en-US" sz="1500" dirty="0"/>
           </a:p>
